--- a/2026-FALL/Week02.pptx
+++ b/2026-FALL/Week02.pptx
@@ -3701,7 +3701,7 @@
             <a:pPr lvl="1"/>
             <a:r>
               <a:rPr lang="en-US" dirty="0"/>
-              <a:t>VS2022 .NET 6.0: 6.0.3</a:t>
+              <a:t>VS2022 .NET 8.0: 8.0.3</a:t>
             </a:r>
           </a:p>
           <a:p>
@@ -3727,13 +3727,14 @@
           <a:p>
             <a:pPr lvl="1"/>
             <a:r>
+              <a:rPr lang="en-US" dirty="0"/>
+              <a:t>VS2022 .NET 8.0</a:t>
+            </a:r>
+            <a:r>
               <a:rPr lang="en-US"/>
-              <a:t>VS2022 </a:t>
-            </a:r>
-            <a:r>
-              <a:rPr lang="en-US" dirty="0"/>
-              <a:t>.NET 6.0: 6.0.3</a:t>
-            </a:r>
+              <a:t>: 8.0.3</a:t>
+            </a:r>
+            <a:endParaRPr lang="en-US" dirty="0"/>
           </a:p>
           <a:p>
             <a:r>
@@ -5837,7 +5838,7 @@
           <a:p>
             <a:r>
               <a:rPr lang="en-US" dirty="0"/>
-              <a:t>Create new Resource Group named ‘cis174dmacc</a:t>
+              <a:t>Create new Resource Group named ‘cis174dmacc’</a:t>
             </a:r>
           </a:p>
         </p:txBody>
